--- a/Slide-people-counting-system.pptx
+++ b/Slide-people-counting-system.pptx
@@ -526,12 +526,7 @@
         <p:txBody>
           <a:bodyPr/>
           <a:lstStyle/>
-          <a:p>
-            <a:r>
-              <a:rPr lang="en-US" dirty="0"/>
-              <a:t>Giới thiệu đồ án: một chương trình Python đếm số khách ra vào một không gian bằng camera thường, chạy thời gian thực trên máy cá nhân.</a:t>
-            </a:r>
-          </a:p>
+          <a:p/>
         </p:txBody>
       </p:sp>
       <p:sp>
@@ -613,12 +608,7 @@
         <p:txBody>
           <a:bodyPr/>
           <a:lstStyle/>
-          <a:p>
-            <a:r>
-              <a:rPr lang="en-US" dirty="0"/>
-              <a:t>Trọng tâm của cả hệ thống. So sánh tọa độ y của tâm bbox ở khung trước và khung hiện tại: nếu vạch nằm kẹp giữa hai giá trị thì người đó vừa cắt vạch. counted_direction đảm bảo mỗi ID chỉ được đếm một lần cho mỗi hướng.</a:t>
-            </a:r>
-          </a:p>
+          <a:p/>
         </p:txBody>
       </p:sp>
       <p:sp>
@@ -700,12 +690,7 @@
         <p:txBody>
           <a:bodyPr/>
           <a:lstStyle/>
-          <a:p>
-            <a:r>
-              <a:rPr lang="en-US" dirty="0"/>
-              <a:t>Khi một người bị che khuất rồi xuất hiện lại, ByteTrack cấp ID mới và họ sẽ bị đếm hai lần. Giải pháp: lưu histogram màu HSV của mỗi người, so sánh bằng hệ số tương quan; giống trên 0.6 trong vòng 45 khung thì coi là cùng một người và kế thừa trạng thái đã đếm.</a:t>
-            </a:r>
-          </a:p>
+          <a:p/>
         </p:txBody>
       </p:sp>
       <p:sp>
@@ -787,12 +772,7 @@
         <p:txBody>
           <a:bodyPr/>
           <a:lstStyle/>
-          <a:p>
-            <a:r>
-              <a:rPr lang="en-US" dirty="0"/>
-              <a:t>Tổng hợp bảy thuật toán thực sự có trong chương trình: hai cái đầu là của thư viện — YOLOv8 và ByteTrack; năm cái sau là phần tự viết. Nếu họi câu khó nhất thì thường là Union-Find và cách so histogram màu, nên chuẩn bị kỹ hai ý đó.</a:t>
-            </a:r>
-          </a:p>
+          <a:p/>
         </p:txBody>
       </p:sp>
       <p:sp>
@@ -874,12 +854,7 @@
         <p:txBody>
           <a:bodyPr/>
           <a:lstStyle/>
-          <a:p>
-            <a:r>
-              <a:rPr lang="en-US" dirty="0"/>
-              <a:t>Hai đầu ra: bảng số liệu vẽ trực tiếp lên khung hình cho người trực, và hai file CSV cho phân tích về sau. Heatmap bật tắt bằng phím H, tích nhiệt tại tâm người rồi phai dần theo hệ số 0.99 mỗi khung.</a:t>
-            </a:r>
-          </a:p>
+          <a:p/>
         </p:txBody>
       </p:sp>
       <p:sp>
@@ -961,12 +936,7 @@
         <p:txBody>
           <a:bodyPr/>
           <a:lstStyle/>
-          <a:p>
-            <a:r>
-              <a:rPr lang="en-US" dirty="0"/>
-              <a:t>Kết bài bằng sự trung thực: nêu rõ giới hạn hiện tại và hướng đi tiếp. Nhấn re-ID theo màu áo là điểm yếu nhất — hai người mặc áo cùng màu sẽ bị nhầm.</a:t>
-            </a:r>
-          </a:p>
+          <a:p/>
         </p:txBody>
       </p:sp>
       <p:sp>
@@ -1048,12 +1018,7 @@
         <p:txBody>
           <a:bodyPr/>
           <a:lstStyle/>
-          <a:p>
-            <a:r>
-              <a:rPr lang="en-US" dirty="0"/>
-              <a:t>Cảm ơn thầy và các bạn, mời đặt câu hỏi.</a:t>
-            </a:r>
-          </a:p>
+          <a:p/>
         </p:txBody>
       </p:sp>
       <p:sp>
@@ -1135,12 +1100,7 @@
         <p:txBody>
           <a:bodyPr/>
           <a:lstStyle/>
-          <a:p>
-            <a:r>
-              <a:rPr lang="en-US" dirty="0"/>
-              <a:t>Đếm khách thủ công vừa tốn người vừa sai số. Mục tiêu là một chương trình chạy được trên webcam sẵn có, không cần cảm biến chuyên dụng, và tự ghi số liệu ra file.</a:t>
-            </a:r>
-          </a:p>
+          <a:p/>
         </p:txBody>
       </p:sp>
       <p:sp>
@@ -1222,12 +1182,7 @@
         <p:txBody>
           <a:bodyPr/>
           <a:lstStyle/>
-          <a:p>
-            <a:r>
-              <a:rPr lang="en-US" dirty="0"/>
-              <a:t>Đây là luồng xử lý lặp lại cho từng khung hình. Nhấn mạnh: mọi thứ nằm trong một vòng lặp while duy nhất, không có hàng đợi hay đa luồng.</a:t>
-            </a:r>
-          </a:p>
+          <a:p/>
         </p:txBody>
       </p:sp>
       <p:sp>
@@ -1309,12 +1264,7 @@
         <p:txBody>
           <a:bodyPr/>
           <a:lstStyle/>
-          <a:p>
-            <a:r>
-              <a:rPr lang="en-US" dirty="0"/>
-              <a:t>Slide tổng quan: chín bước của chương trình, đọc theo hình chữ S — hàng trên từ nguồn video đến lọc bbox, hàng dưới ngược lại từ tái định danh đến ghi sổ. Nhấn rằng toàn bộ chín bước nằm trong một vòng lặp while duy nhất, mỗi khung hình đi hết chu trình rồi mới đọc khung tiếp theo.</a:t>
-            </a:r>
-          </a:p>
+          <a:p/>
         </p:txBody>
       </p:sp>
       <p:sp>
@@ -1396,12 +1346,7 @@
         <p:txBody>
           <a:bodyPr/>
           <a:lstStyle/>
-          <a:p>
-            <a:r>
-              <a:rPr lang="en-US" dirty="0"/>
-              <a:t>Toàn bộ hệ thống chỉ cần ba thư viện ngoài: Ultralytics, OpenCV và NumPy. Phần ghi file dùng thư viện chuẩn của Python nên không phải cài thêm gì, chạy được ngay trên máy cá nhân không cần GPU.</a:t>
-            </a:r>
-          </a:p>
+          <a:p/>
         </p:txBody>
       </p:sp>
       <p:sp>
@@ -1483,12 +1428,7 @@
         <p:txBody>
           <a:bodyPr/>
           <a:lstStyle/>
-          <a:p>
-            <a:r>
-              <a:rPr lang="en-US" dirty="0"/>
-              <a:t>Các hằng số ở đầu file là nơi tinh chỉnh hệ thống cho từng hiện trường. Nói rõ vì sao chọn conf 0.5 thay vì 0.4: giảm false positive khi ánh sáng kém.</a:t>
-            </a:r>
-          </a:p>
+          <a:p/>
         </p:txBody>
       </p:sp>
       <p:sp>
@@ -1570,12 +1510,7 @@
         <p:txBody>
           <a:bodyPr/>
           <a:lstStyle/>
-          <a:p>
-            <a:r>
-              <a:rPr lang="en-US" dirty="0"/>
-              <a:t>Giải thích bên trong mô hình: ảnh vào được backbone CSPDarknet với các khối C2f trích đặc trưng, SPPF mở rộng vùng nhìn, neck PAN-FPN trộn đặc trưng ba tỷ lệ để bắt được cả người ở xa và người ở gần, head tách đôi nhánh phân loại và nhánh hộp, không dùng anchor nên bớt siêu tham số. Cuối cùng NMS loại các hộp trùng, chỉ giữ một hộp cho mỗi người.</a:t>
-            </a:r>
-          </a:p>
+          <a:p/>
         </p:txBody>
       </p:sp>
       <p:sp>
@@ -1657,12 +1592,7 @@
         <p:txBody>
           <a:bodyPr/>
           <a:lstStyle/>
-          <a:p>
-            <a:r>
-              <a:rPr lang="en-US" dirty="0"/>
-              <a:t>Đi theo bốn bước trong hình: đọc khung hình từ camera, YOLOv8n khoanh vùng người với conf từ 0.5, ByteTrack gán ID ổn định qua các khung, rồi lọc và gộp bbox. Nhấn mạnh dòng lệnh ở giữa: cả phát hiện lẫn bám ID gói trong một lệnh model.track duy nhất — persist=True giữ trạng thái tracker nên ID không bị đặt lại mỗi khung hình.</a:t>
-            </a:r>
-          </a:p>
+          <a:p/>
         </p:txBody>
       </p:sp>
       <p:sp>
@@ -1744,12 +1674,7 @@
         <p:txBody>
           <a:bodyPr/>
           <a:lstStyle/>
-          <a:p>
-            <a:r>
-              <a:rPr lang="en-US" dirty="0"/>
-              <a:t>Đây là phần tự viết thêm ngoài YOLO. YOLO đôi khi tách một người thành hai khung, hoặc bắt nhầm cánh tay thành người. Union-Find gom các khung chồng nhau thành nhóm, mỗi nhóm chỉ giữ một đại diện.</a:t>
-            </a:r>
-          </a:p>
+          <a:p/>
         </p:txBody>
       </p:sp>
       <p:sp>
